--- a/ppt/out/WLC2급_제06강_장례·장묘제도의변화와새로운장사문화.pptx
+++ b/ppt/out/WLC2급_제06강_장례·장묘제도의변화와새로운장사문화.pptx
@@ -161,7 +161,7 @@
   <p:extLst>
     <p:ext uri="{521415D9-36F7-43E2-AB2F-B90AF26B5E84}">
       <p14:sectionLst xmlns:p14="http://schemas.microsoft.com/office/powerpoint/2010/main">
-        <p14:section name="열기" id="{f6904041-eeb9-af97-4987-6aa2b0af6423}">
+        <p14:section name="열기" id="{1ae67617-0f55-4849-7576-c37de7e187ef}">
           <p14:sldIdLst>
             <p14:sldId id="256"/>
             <p14:sldId id="257"/>
@@ -174,7 +174,7 @@
             <p14:sldId id="264"/>
           </p14:sldIdLst>
         </p14:section>
-        <p14:section name="1교시 장사법의 언어와 장례의 흐름" id="{6c9e4eb3-5082-e231-f2dd-fdaa82092b89}">
+        <p14:section name="1교시 장사법의 언어와 장례의 흐름" id="{0702bda2-a6cf-5fce-20c0-fd59db943e10}">
           <p14:sldIdLst>
             <p14:sldId id="265"/>
             <p14:sldId id="266"/>
@@ -189,7 +189,7 @@
             <p14:sldId id="275"/>
           </p14:sldIdLst>
         </p14:section>
-        <p14:section name="2교시 화장 이후의 선택과 공공의 장례" id="{75ce5454-f4f7-41b7-9e8a-1bee6d888dea}">
+        <p14:section name="2교시 화장 이후의 선택과 공공의 장례" id="{d706b7c9-acb3-3852-23fc-742575ba651e}">
           <p14:sldIdLst>
             <p14:sldId id="276"/>
             <p14:sldId id="277"/>
@@ -208,7 +208,7 @@
             <p14:sldId id="290"/>
           </p14:sldIdLst>
         </p14:section>
-        <p14:section name="3교시 나의 장례를 설계하다" id="{464d6214-8f02-c6b9-cf4b-34d49e716d04}">
+        <p14:section name="3교시 나의 장례를 설계하다" id="{37cdb03f-ac69-b788-0705-f7a36c47096c}">
           <p14:sldIdLst>
             <p14:sldId id="291"/>
             <p14:sldId id="292"/>
@@ -226,7 +226,7 @@
             <p14:sldId id="304"/>
           </p14:sldIdLst>
         </p14:section>
-        <p14:section name="정리와 예고" id="{ce43f354-3df7-1266-0efd-73706201a87b}">
+        <p14:section name="정리와 예고" id="{0544b395-2d66-c185-1241-dd0f382dc619}">
           <p14:sldIdLst>
             <p14:sldId id="305"/>
             <p14:sldId id="306"/>
@@ -6660,8 +6660,8 @@
         </p:nvSpPr>
         <p:spPr>
           <a:xfrm>
-            <a:off x="548640" y="2560320"/>
-            <a:ext cx="9144000" cy="1097280"/>
+            <a:off x="548640" y="2514600"/>
+            <a:ext cx="10607040" cy="1828800"/>
           </a:xfrm>
           <a:prstGeom prst="rect">
             <a:avLst/>
@@ -6699,7 +6699,7 @@
         </p:nvSpPr>
         <p:spPr>
           <a:xfrm>
-            <a:off x="548640" y="3703320"/>
+            <a:off x="548640" y="4434840"/>
             <a:ext cx="8229600" cy="411480"/>
           </a:xfrm>
           <a:prstGeom prst="rect">
@@ -6735,7 +6735,7 @@
         </p:nvSpPr>
         <p:spPr>
           <a:xfrm>
-            <a:off x="548640" y="5120640"/>
+            <a:off x="548640" y="4983480"/>
             <a:ext cx="8229600" cy="365760"/>
           </a:xfrm>
           <a:prstGeom prst="rect">
@@ -52075,47 +52075,47 @@
 </file>
 
 <file path=ppt/theme/theme1.xml><?xml version="1.0" encoding="utf-8"?>
-<a:theme xmlns:a="http://schemas.openxmlformats.org/drawingml/2006/main" name="WLC Teal">
+<a:theme xmlns:a="http://schemas.openxmlformats.org/drawingml/2006/main" name="Office Theme">
   <a:themeElements>
-    <a:clrScheme name="WLC Teal">
+    <a:clrScheme name="Office">
       <a:dk1>
-        <a:srgbClr val="222222"/>
+        <a:sysClr val="windowText" lastClr="000000"/>
       </a:dk1>
       <a:lt1>
-        <a:srgbClr val="FFFFFF"/>
+        <a:sysClr val="window" lastClr="FFFFFF"/>
       </a:lt1>
       <a:dk2>
-        <a:srgbClr val="1F4E4A"/>
+        <a:srgbClr val="44546A"/>
       </a:dk2>
       <a:lt2>
-        <a:srgbClr val="EAF3F0"/>
+        <a:srgbClr val="E7E6E6"/>
       </a:lt2>
       <a:accent1>
-        <a:srgbClr val="2E7D6B"/>
+        <a:srgbClr val="4472C4"/>
       </a:accent1>
       <a:accent2>
-        <a:srgbClr val="D98E04"/>
+        <a:srgbClr val="ED7D31"/>
       </a:accent2>
       <a:accent3>
-        <a:srgbClr val="3A6EA5"/>
+        <a:srgbClr val="A5A5A5"/>
       </a:accent3>
       <a:accent4>
-        <a:srgbClr val="B5452F"/>
+        <a:srgbClr val="FFC000"/>
       </a:accent4>
       <a:accent5>
-        <a:srgbClr val="8FB9A8"/>
+        <a:srgbClr val="5B9BD5"/>
       </a:accent5>
       <a:accent6>
-        <a:srgbClr val="6B6B6B"/>
+        <a:srgbClr val="70AD47"/>
       </a:accent6>
       <a:hlink>
-        <a:srgbClr val="3A6EA5"/>
+        <a:srgbClr val="0563C1"/>
       </a:hlink>
       <a:folHlink>
-        <a:srgbClr val="1F4E4A"/>
+        <a:srgbClr val="954F72"/>
       </a:folHlink>
     </a:clrScheme>
-    <a:fontScheme name="WLC Teal">
+    <a:fontScheme name="Office">
       <a:majorFont>
         <a:latin typeface="Noto Serif KR Black"/>
         <a:ea typeface=""/>

--- a/ppt/out/WLC2급_제06강_장례·장묘제도의변화와새로운장사문화.pptx
+++ b/ppt/out/WLC2급_제06강_장례·장묘제도의변화와새로운장사문화.pptx
@@ -161,7 +161,7 @@
   <p:extLst>
     <p:ext uri="{521415D9-36F7-43E2-AB2F-B90AF26B5E84}">
       <p14:sectionLst xmlns:p14="http://schemas.microsoft.com/office/powerpoint/2010/main">
-        <p14:section name="열기" id="{1ae67617-0f55-4849-7576-c37de7e187ef}">
+        <p14:section name="열기" id="{f22c50cf-cdfc-7e3f-e0b7-34b53658d41a}">
           <p14:sldIdLst>
             <p14:sldId id="256"/>
             <p14:sldId id="257"/>
@@ -174,7 +174,7 @@
             <p14:sldId id="264"/>
           </p14:sldIdLst>
         </p14:section>
-        <p14:section name="1교시 장사법의 언어와 장례의 흐름" id="{0702bda2-a6cf-5fce-20c0-fd59db943e10}">
+        <p14:section name="1교시 장사법의 언어와 장례의 흐름" id="{da7e7224-cb9e-7925-ce49-8398dc5a65d7}">
           <p14:sldIdLst>
             <p14:sldId id="265"/>
             <p14:sldId id="266"/>
@@ -189,7 +189,7 @@
             <p14:sldId id="275"/>
           </p14:sldIdLst>
         </p14:section>
-        <p14:section name="2교시 화장 이후의 선택과 공공의 장례" id="{d706b7c9-acb3-3852-23fc-742575ba651e}">
+        <p14:section name="2교시 화장 이후의 선택과 공공의 장례" id="{e24ae5e0-e220-1106-ac6c-68e6b37d7fc2}">
           <p14:sldIdLst>
             <p14:sldId id="276"/>
             <p14:sldId id="277"/>
@@ -208,7 +208,7 @@
             <p14:sldId id="290"/>
           </p14:sldIdLst>
         </p14:section>
-        <p14:section name="3교시 나의 장례를 설계하다" id="{37cdb03f-ac69-b788-0705-f7a36c47096c}">
+        <p14:section name="3교시 나의 장례를 설계하다" id="{81c1404f-1312-0392-40e4-024add74602a}">
           <p14:sldIdLst>
             <p14:sldId id="291"/>
             <p14:sldId id="292"/>
@@ -226,7 +226,7 @@
             <p14:sldId id="304"/>
           </p14:sldIdLst>
         </p14:section>
-        <p14:section name="정리와 예고" id="{0544b395-2d66-c185-1241-dd0f382dc619}">
+        <p14:section name="정리와 예고" id="{df37a075-77b0-e40e-f016-5f20e81f54e7}">
           <p14:sldIdLst>
             <p14:sldId id="305"/>
             <p14:sldId id="306"/>
@@ -52075,47 +52075,47 @@
 </file>
 
 <file path=ppt/theme/theme1.xml><?xml version="1.0" encoding="utf-8"?>
-<a:theme xmlns:a="http://schemas.openxmlformats.org/drawingml/2006/main" name="Office Theme">
+<a:theme xmlns:a="http://schemas.openxmlformats.org/drawingml/2006/main" name="WLC Teal">
   <a:themeElements>
-    <a:clrScheme name="Office">
+    <a:clrScheme name="WLC Teal">
       <a:dk1>
-        <a:sysClr val="windowText" lastClr="000000"/>
+        <a:srgbClr val="222222"/>
       </a:dk1>
       <a:lt1>
-        <a:sysClr val="window" lastClr="FFFFFF"/>
+        <a:srgbClr val="FFFFFF"/>
       </a:lt1>
       <a:dk2>
-        <a:srgbClr val="44546A"/>
+        <a:srgbClr val="1F4E4A"/>
       </a:dk2>
       <a:lt2>
-        <a:srgbClr val="E7E6E6"/>
+        <a:srgbClr val="EAF3F0"/>
       </a:lt2>
       <a:accent1>
-        <a:srgbClr val="4472C4"/>
+        <a:srgbClr val="2E7D6B"/>
       </a:accent1>
       <a:accent2>
-        <a:srgbClr val="ED7D31"/>
+        <a:srgbClr val="D98E04"/>
       </a:accent2>
       <a:accent3>
-        <a:srgbClr val="A5A5A5"/>
+        <a:srgbClr val="3A6EA5"/>
       </a:accent3>
       <a:accent4>
-        <a:srgbClr val="FFC000"/>
+        <a:srgbClr val="B5452F"/>
       </a:accent4>
       <a:accent5>
-        <a:srgbClr val="5B9BD5"/>
+        <a:srgbClr val="8FB9A8"/>
       </a:accent5>
       <a:accent6>
-        <a:srgbClr val="70AD47"/>
+        <a:srgbClr val="6B6B6B"/>
       </a:accent6>
       <a:hlink>
-        <a:srgbClr val="0563C1"/>
+        <a:srgbClr val="3A6EA5"/>
       </a:hlink>
       <a:folHlink>
-        <a:srgbClr val="954F72"/>
+        <a:srgbClr val="1F4E4A"/>
       </a:folHlink>
     </a:clrScheme>
-    <a:fontScheme name="Office">
+    <a:fontScheme name="WLC Teal">
       <a:majorFont>
         <a:latin typeface="Noto Serif KR Black"/>
         <a:ea typeface=""/>
